--- a/public/videos/repositories/onsen-list/onsen-list-tech-preview.pptx
+++ b/public/videos/repositories/onsen-list/onsen-list-tech-preview.pptx
@@ -134,7 +134,7 @@
           <p:cNvPr id="2" name="タイトル 1">
             <a:extLst>
               <a:ext uri="{FF2B5EF4-FFF2-40B4-BE49-F238E27FC236}">
-                <a16:creationId xmlns:a16="http://schemas.microsoft.com/office/drawing/2014/main" id="{78B4BC80-DF61-CC93-A5A1-2B572124B519}"/>
+                <a16:creationId xmlns:a16="http://schemas.microsoft.com/office/drawing/2014/main" id="{D5E41A1A-47AF-3F8D-253F-997ACD4C3A49}"/>
               </a:ext>
             </a:extLst>
           </p:cNvPr>
@@ -171,7 +171,7 @@
           <p:cNvPr id="3" name="字幕 2">
             <a:extLst>
               <a:ext uri="{FF2B5EF4-FFF2-40B4-BE49-F238E27FC236}">
-                <a16:creationId xmlns:a16="http://schemas.microsoft.com/office/drawing/2014/main" id="{D8393E68-16CD-BDD8-FCB9-C3D59FF0F36E}"/>
+                <a16:creationId xmlns:a16="http://schemas.microsoft.com/office/drawing/2014/main" id="{9441617E-8371-7A26-AAEA-76274D2BB141}"/>
               </a:ext>
             </a:extLst>
           </p:cNvPr>
@@ -241,7 +241,7 @@
           <p:cNvPr id="4" name="日付プレースホルダー 3">
             <a:extLst>
               <a:ext uri="{FF2B5EF4-FFF2-40B4-BE49-F238E27FC236}">
-                <a16:creationId xmlns:a16="http://schemas.microsoft.com/office/drawing/2014/main" id="{CC884831-0071-21E1-ECD5-086FB568ACAD}"/>
+                <a16:creationId xmlns:a16="http://schemas.microsoft.com/office/drawing/2014/main" id="{3205D16C-778E-AD75-43DE-A23F947E2011}"/>
               </a:ext>
             </a:extLst>
           </p:cNvPr>
@@ -257,7 +257,7 @@
           <a:bodyPr/>
           <a:lstStyle/>
           <a:p>
-            <a:fld id="{590A6DBF-BCB4-437A-9C96-F72DA2C8D429}" type="datetimeFigureOut">
+            <a:fld id="{FE0EF8CD-A123-4872-9453-D8392BEB8EE8}" type="datetimeFigureOut">
               <a:rPr kumimoji="1" lang="ja-JP" altLang="en-US" smtClean="0"/>
               <a:t>2026/7/30</a:t>
             </a:fld>
@@ -270,7 +270,7 @@
           <p:cNvPr id="5" name="フッター プレースホルダー 4">
             <a:extLst>
               <a:ext uri="{FF2B5EF4-FFF2-40B4-BE49-F238E27FC236}">
-                <a16:creationId xmlns:a16="http://schemas.microsoft.com/office/drawing/2014/main" id="{2470B9A2-01F2-96A9-B88F-D1DCF3258B37}"/>
+                <a16:creationId xmlns:a16="http://schemas.microsoft.com/office/drawing/2014/main" id="{6CF9FD42-F069-D03C-02FD-0C53F89CF635}"/>
               </a:ext>
             </a:extLst>
           </p:cNvPr>
@@ -295,7 +295,7 @@
           <p:cNvPr id="6" name="スライド番号プレースホルダー 5">
             <a:extLst>
               <a:ext uri="{FF2B5EF4-FFF2-40B4-BE49-F238E27FC236}">
-                <a16:creationId xmlns:a16="http://schemas.microsoft.com/office/drawing/2014/main" id="{7EA61363-A435-B88A-17F8-BBBD74BA1F95}"/>
+                <a16:creationId xmlns:a16="http://schemas.microsoft.com/office/drawing/2014/main" id="{8D94E955-F7A4-0118-F14F-9CAA5FA546CA}"/>
               </a:ext>
             </a:extLst>
           </p:cNvPr>
@@ -311,7 +311,7 @@
           <a:bodyPr/>
           <a:lstStyle/>
           <a:p>
-            <a:fld id="{3F27CBD0-2DD2-46F7-B886-48E0FA7C6F19}" type="slidenum">
+            <a:fld id="{719CBD54-3D3B-46C8-8DA0-15A5B9F8456C}" type="slidenum">
               <a:rPr kumimoji="1" lang="ja-JP" altLang="en-US" smtClean="0"/>
               <a:t>‹#›</a:t>
             </a:fld>
@@ -322,7 +322,7 @@
     </p:spTree>
     <p:extLst>
       <p:ext uri="{BB962C8B-B14F-4D97-AF65-F5344CB8AC3E}">
-        <p14:creationId xmlns:p14="http://schemas.microsoft.com/office/powerpoint/2010/main" val="3138845455"/>
+        <p14:creationId xmlns:p14="http://schemas.microsoft.com/office/powerpoint/2010/main" val="2394978914"/>
       </p:ext>
     </p:extLst>
   </p:cSld>
@@ -354,7 +354,7 @@
           <p:cNvPr id="2" name="タイトル 1">
             <a:extLst>
               <a:ext uri="{FF2B5EF4-FFF2-40B4-BE49-F238E27FC236}">
-                <a16:creationId xmlns:a16="http://schemas.microsoft.com/office/drawing/2014/main" id="{459C8EDE-B4B8-13EE-ECA8-ED1C1CE68CF7}"/>
+                <a16:creationId xmlns:a16="http://schemas.microsoft.com/office/drawing/2014/main" id="{84B416B8-8DD9-81D4-49D9-FC28B17166D5}"/>
               </a:ext>
             </a:extLst>
           </p:cNvPr>
@@ -382,7 +382,7 @@
           <p:cNvPr id="3" name="縦書きテキスト プレースホルダー 2">
             <a:extLst>
               <a:ext uri="{FF2B5EF4-FFF2-40B4-BE49-F238E27FC236}">
-                <a16:creationId xmlns:a16="http://schemas.microsoft.com/office/drawing/2014/main" id="{3C17A148-24CE-A26C-FCAC-51FE4C76AB95}"/>
+                <a16:creationId xmlns:a16="http://schemas.microsoft.com/office/drawing/2014/main" id="{7659A99E-B8A3-4E30-A2C4-2FE5F3C778D1}"/>
               </a:ext>
             </a:extLst>
           </p:cNvPr>
@@ -471,7 +471,7 @@
           <p:cNvPr id="4" name="日付プレースホルダー 3">
             <a:extLst>
               <a:ext uri="{FF2B5EF4-FFF2-40B4-BE49-F238E27FC236}">
-                <a16:creationId xmlns:a16="http://schemas.microsoft.com/office/drawing/2014/main" id="{8362B1F7-0448-E66C-70A2-67497BC38BE1}"/>
+                <a16:creationId xmlns:a16="http://schemas.microsoft.com/office/drawing/2014/main" id="{F7631B62-C4F3-5BE9-CF33-E50DA61DADED}"/>
               </a:ext>
             </a:extLst>
           </p:cNvPr>
@@ -487,7 +487,7 @@
           <a:bodyPr/>
           <a:lstStyle/>
           <a:p>
-            <a:fld id="{590A6DBF-BCB4-437A-9C96-F72DA2C8D429}" type="datetimeFigureOut">
+            <a:fld id="{FE0EF8CD-A123-4872-9453-D8392BEB8EE8}" type="datetimeFigureOut">
               <a:rPr kumimoji="1" lang="ja-JP" altLang="en-US" smtClean="0"/>
               <a:t>2026/7/30</a:t>
             </a:fld>
@@ -500,7 +500,7 @@
           <p:cNvPr id="5" name="フッター プレースホルダー 4">
             <a:extLst>
               <a:ext uri="{FF2B5EF4-FFF2-40B4-BE49-F238E27FC236}">
-                <a16:creationId xmlns:a16="http://schemas.microsoft.com/office/drawing/2014/main" id="{EA3540B4-6F24-A05F-47CF-E124344B12A0}"/>
+                <a16:creationId xmlns:a16="http://schemas.microsoft.com/office/drawing/2014/main" id="{65837A3D-D8C3-137D-487B-A11B12944E90}"/>
               </a:ext>
             </a:extLst>
           </p:cNvPr>
@@ -525,7 +525,7 @@
           <p:cNvPr id="6" name="スライド番号プレースホルダー 5">
             <a:extLst>
               <a:ext uri="{FF2B5EF4-FFF2-40B4-BE49-F238E27FC236}">
-                <a16:creationId xmlns:a16="http://schemas.microsoft.com/office/drawing/2014/main" id="{CFB42863-6A73-1482-2764-35EF4B9C7A7B}"/>
+                <a16:creationId xmlns:a16="http://schemas.microsoft.com/office/drawing/2014/main" id="{85647DB4-996C-CC84-03C8-D8653B2D987A}"/>
               </a:ext>
             </a:extLst>
           </p:cNvPr>
@@ -541,7 +541,7 @@
           <a:bodyPr/>
           <a:lstStyle/>
           <a:p>
-            <a:fld id="{3F27CBD0-2DD2-46F7-B886-48E0FA7C6F19}" type="slidenum">
+            <a:fld id="{719CBD54-3D3B-46C8-8DA0-15A5B9F8456C}" type="slidenum">
               <a:rPr kumimoji="1" lang="ja-JP" altLang="en-US" smtClean="0"/>
               <a:t>‹#›</a:t>
             </a:fld>
@@ -552,7 +552,7 @@
     </p:spTree>
     <p:extLst>
       <p:ext uri="{BB962C8B-B14F-4D97-AF65-F5344CB8AC3E}">
-        <p14:creationId xmlns:p14="http://schemas.microsoft.com/office/powerpoint/2010/main" val="119287200"/>
+        <p14:creationId xmlns:p14="http://schemas.microsoft.com/office/powerpoint/2010/main" val="75824594"/>
       </p:ext>
     </p:extLst>
   </p:cSld>
@@ -584,7 +584,7 @@
           <p:cNvPr id="2" name="縦書きタイトル 1">
             <a:extLst>
               <a:ext uri="{FF2B5EF4-FFF2-40B4-BE49-F238E27FC236}">
-                <a16:creationId xmlns:a16="http://schemas.microsoft.com/office/drawing/2014/main" id="{5D575CC6-8D26-58E3-0CC6-D5552EBEE8AD}"/>
+                <a16:creationId xmlns:a16="http://schemas.microsoft.com/office/drawing/2014/main" id="{88962D78-49BD-DA53-D0C9-842098BA5CE4}"/>
               </a:ext>
             </a:extLst>
           </p:cNvPr>
@@ -617,7 +617,7 @@
           <p:cNvPr id="3" name="縦書きテキスト プレースホルダー 2">
             <a:extLst>
               <a:ext uri="{FF2B5EF4-FFF2-40B4-BE49-F238E27FC236}">
-                <a16:creationId xmlns:a16="http://schemas.microsoft.com/office/drawing/2014/main" id="{BAAE26DF-2922-8F00-EBD9-EEC5DFE04AB1}"/>
+                <a16:creationId xmlns:a16="http://schemas.microsoft.com/office/drawing/2014/main" id="{26F32084-F89B-1697-B53E-AA0230C1527D}"/>
               </a:ext>
             </a:extLst>
           </p:cNvPr>
@@ -711,7 +711,7 @@
           <p:cNvPr id="4" name="日付プレースホルダー 3">
             <a:extLst>
               <a:ext uri="{FF2B5EF4-FFF2-40B4-BE49-F238E27FC236}">
-                <a16:creationId xmlns:a16="http://schemas.microsoft.com/office/drawing/2014/main" id="{41312C11-C243-FF9C-CBA3-AB83E22CCEF1}"/>
+                <a16:creationId xmlns:a16="http://schemas.microsoft.com/office/drawing/2014/main" id="{60056EFD-695A-917F-FCE7-78CCE9939C1C}"/>
               </a:ext>
             </a:extLst>
           </p:cNvPr>
@@ -727,7 +727,7 @@
           <a:bodyPr/>
           <a:lstStyle/>
           <a:p>
-            <a:fld id="{590A6DBF-BCB4-437A-9C96-F72DA2C8D429}" type="datetimeFigureOut">
+            <a:fld id="{FE0EF8CD-A123-4872-9453-D8392BEB8EE8}" type="datetimeFigureOut">
               <a:rPr kumimoji="1" lang="ja-JP" altLang="en-US" smtClean="0"/>
               <a:t>2026/7/30</a:t>
             </a:fld>
@@ -740,7 +740,7 @@
           <p:cNvPr id="5" name="フッター プレースホルダー 4">
             <a:extLst>
               <a:ext uri="{FF2B5EF4-FFF2-40B4-BE49-F238E27FC236}">
-                <a16:creationId xmlns:a16="http://schemas.microsoft.com/office/drawing/2014/main" id="{03EC7B86-8378-CDE8-E356-C62F4481B5F3}"/>
+                <a16:creationId xmlns:a16="http://schemas.microsoft.com/office/drawing/2014/main" id="{8D2795F4-DF9A-85CC-5791-A7CFA32B0240}"/>
               </a:ext>
             </a:extLst>
           </p:cNvPr>
@@ -765,7 +765,7 @@
           <p:cNvPr id="6" name="スライド番号プレースホルダー 5">
             <a:extLst>
               <a:ext uri="{FF2B5EF4-FFF2-40B4-BE49-F238E27FC236}">
-                <a16:creationId xmlns:a16="http://schemas.microsoft.com/office/drawing/2014/main" id="{D74FB688-1E70-A249-BD18-306E044C1099}"/>
+                <a16:creationId xmlns:a16="http://schemas.microsoft.com/office/drawing/2014/main" id="{F8E07B9F-D4CE-C740-8BCD-2E0C99C9B783}"/>
               </a:ext>
             </a:extLst>
           </p:cNvPr>
@@ -781,7 +781,7 @@
           <a:bodyPr/>
           <a:lstStyle/>
           <a:p>
-            <a:fld id="{3F27CBD0-2DD2-46F7-B886-48E0FA7C6F19}" type="slidenum">
+            <a:fld id="{719CBD54-3D3B-46C8-8DA0-15A5B9F8456C}" type="slidenum">
               <a:rPr kumimoji="1" lang="ja-JP" altLang="en-US" smtClean="0"/>
               <a:t>‹#›</a:t>
             </a:fld>
@@ -792,7 +792,7 @@
     </p:spTree>
     <p:extLst>
       <p:ext uri="{BB962C8B-B14F-4D97-AF65-F5344CB8AC3E}">
-        <p14:creationId xmlns:p14="http://schemas.microsoft.com/office/powerpoint/2010/main" val="1067269772"/>
+        <p14:creationId xmlns:p14="http://schemas.microsoft.com/office/powerpoint/2010/main" val="660667687"/>
       </p:ext>
     </p:extLst>
   </p:cSld>
@@ -824,7 +824,7 @@
           <p:cNvPr id="2" name="タイトル 1">
             <a:extLst>
               <a:ext uri="{FF2B5EF4-FFF2-40B4-BE49-F238E27FC236}">
-                <a16:creationId xmlns:a16="http://schemas.microsoft.com/office/drawing/2014/main" id="{6060E974-E8C0-1DB1-9430-6161E7AE4E8B}"/>
+                <a16:creationId xmlns:a16="http://schemas.microsoft.com/office/drawing/2014/main" id="{3648A63A-B77D-FDCA-A4F8-8B89C12D31BF}"/>
               </a:ext>
             </a:extLst>
           </p:cNvPr>
@@ -852,7 +852,7 @@
           <p:cNvPr id="3" name="コンテンツ プレースホルダー 2">
             <a:extLst>
               <a:ext uri="{FF2B5EF4-FFF2-40B4-BE49-F238E27FC236}">
-                <a16:creationId xmlns:a16="http://schemas.microsoft.com/office/drawing/2014/main" id="{B350BF69-C8B5-02B6-AD74-418D5CFE0C84}"/>
+                <a16:creationId xmlns:a16="http://schemas.microsoft.com/office/drawing/2014/main" id="{D7AFF6CB-2691-65CF-2887-546594E77E4E}"/>
               </a:ext>
             </a:extLst>
           </p:cNvPr>
@@ -941,7 +941,7 @@
           <p:cNvPr id="4" name="日付プレースホルダー 3">
             <a:extLst>
               <a:ext uri="{FF2B5EF4-FFF2-40B4-BE49-F238E27FC236}">
-                <a16:creationId xmlns:a16="http://schemas.microsoft.com/office/drawing/2014/main" id="{67C51F79-A48D-E403-9D38-4E7146F0A1D2}"/>
+                <a16:creationId xmlns:a16="http://schemas.microsoft.com/office/drawing/2014/main" id="{F7421866-8071-09CB-FAE7-586F1B2D032C}"/>
               </a:ext>
             </a:extLst>
           </p:cNvPr>
@@ -957,7 +957,7 @@
           <a:bodyPr/>
           <a:lstStyle/>
           <a:p>
-            <a:fld id="{590A6DBF-BCB4-437A-9C96-F72DA2C8D429}" type="datetimeFigureOut">
+            <a:fld id="{FE0EF8CD-A123-4872-9453-D8392BEB8EE8}" type="datetimeFigureOut">
               <a:rPr kumimoji="1" lang="ja-JP" altLang="en-US" smtClean="0"/>
               <a:t>2026/7/30</a:t>
             </a:fld>
@@ -970,7 +970,7 @@
           <p:cNvPr id="5" name="フッター プレースホルダー 4">
             <a:extLst>
               <a:ext uri="{FF2B5EF4-FFF2-40B4-BE49-F238E27FC236}">
-                <a16:creationId xmlns:a16="http://schemas.microsoft.com/office/drawing/2014/main" id="{8F1E74DC-37FF-802C-51FC-A6234F0F5F8F}"/>
+                <a16:creationId xmlns:a16="http://schemas.microsoft.com/office/drawing/2014/main" id="{E84879B5-5D03-D5E0-5ED8-8C313DC0141D}"/>
               </a:ext>
             </a:extLst>
           </p:cNvPr>
@@ -995,7 +995,7 @@
           <p:cNvPr id="6" name="スライド番号プレースホルダー 5">
             <a:extLst>
               <a:ext uri="{FF2B5EF4-FFF2-40B4-BE49-F238E27FC236}">
-                <a16:creationId xmlns:a16="http://schemas.microsoft.com/office/drawing/2014/main" id="{E54617E9-6F63-56A5-ABAC-F05C6D0A7B09}"/>
+                <a16:creationId xmlns:a16="http://schemas.microsoft.com/office/drawing/2014/main" id="{899F7F5E-0EEA-1C01-A3D1-70DE30BD26B3}"/>
               </a:ext>
             </a:extLst>
           </p:cNvPr>
@@ -1011,7 +1011,7 @@
           <a:bodyPr/>
           <a:lstStyle/>
           <a:p>
-            <a:fld id="{3F27CBD0-2DD2-46F7-B886-48E0FA7C6F19}" type="slidenum">
+            <a:fld id="{719CBD54-3D3B-46C8-8DA0-15A5B9F8456C}" type="slidenum">
               <a:rPr kumimoji="1" lang="ja-JP" altLang="en-US" smtClean="0"/>
               <a:t>‹#›</a:t>
             </a:fld>
@@ -1022,7 +1022,7 @@
     </p:spTree>
     <p:extLst>
       <p:ext uri="{BB962C8B-B14F-4D97-AF65-F5344CB8AC3E}">
-        <p14:creationId xmlns:p14="http://schemas.microsoft.com/office/powerpoint/2010/main" val="720002410"/>
+        <p14:creationId xmlns:p14="http://schemas.microsoft.com/office/powerpoint/2010/main" val="1187448876"/>
       </p:ext>
     </p:extLst>
   </p:cSld>
@@ -1054,7 +1054,7 @@
           <p:cNvPr id="2" name="タイトル 1">
             <a:extLst>
               <a:ext uri="{FF2B5EF4-FFF2-40B4-BE49-F238E27FC236}">
-                <a16:creationId xmlns:a16="http://schemas.microsoft.com/office/drawing/2014/main" id="{3AB42B99-AE42-9D46-6D58-B52407BF3844}"/>
+                <a16:creationId xmlns:a16="http://schemas.microsoft.com/office/drawing/2014/main" id="{183AB897-CC2A-7DC0-78BF-830E7ED9256B}"/>
               </a:ext>
             </a:extLst>
           </p:cNvPr>
@@ -1091,7 +1091,7 @@
           <p:cNvPr id="3" name="テキスト プレースホルダー 2">
             <a:extLst>
               <a:ext uri="{FF2B5EF4-FFF2-40B4-BE49-F238E27FC236}">
-                <a16:creationId xmlns:a16="http://schemas.microsoft.com/office/drawing/2014/main" id="{82567E55-46B8-F74F-2460-52295BC9D527}"/>
+                <a16:creationId xmlns:a16="http://schemas.microsoft.com/office/drawing/2014/main" id="{DAE1458C-AE48-2733-1E7E-0CB85CAF2E64}"/>
               </a:ext>
             </a:extLst>
           </p:cNvPr>
@@ -1216,7 +1216,7 @@
           <p:cNvPr id="4" name="日付プレースホルダー 3">
             <a:extLst>
               <a:ext uri="{FF2B5EF4-FFF2-40B4-BE49-F238E27FC236}">
-                <a16:creationId xmlns:a16="http://schemas.microsoft.com/office/drawing/2014/main" id="{9B64C7C4-F104-CE5D-4841-AE5BBC44427D}"/>
+                <a16:creationId xmlns:a16="http://schemas.microsoft.com/office/drawing/2014/main" id="{4F0BEBFD-8368-8F8A-26A0-E86C8A8528E8}"/>
               </a:ext>
             </a:extLst>
           </p:cNvPr>
@@ -1232,7 +1232,7 @@
           <a:bodyPr/>
           <a:lstStyle/>
           <a:p>
-            <a:fld id="{590A6DBF-BCB4-437A-9C96-F72DA2C8D429}" type="datetimeFigureOut">
+            <a:fld id="{FE0EF8CD-A123-4872-9453-D8392BEB8EE8}" type="datetimeFigureOut">
               <a:rPr kumimoji="1" lang="ja-JP" altLang="en-US" smtClean="0"/>
               <a:t>2026/7/30</a:t>
             </a:fld>
@@ -1245,7 +1245,7 @@
           <p:cNvPr id="5" name="フッター プレースホルダー 4">
             <a:extLst>
               <a:ext uri="{FF2B5EF4-FFF2-40B4-BE49-F238E27FC236}">
-                <a16:creationId xmlns:a16="http://schemas.microsoft.com/office/drawing/2014/main" id="{47D171BB-0CFA-FFDB-7060-D6DF466008F9}"/>
+                <a16:creationId xmlns:a16="http://schemas.microsoft.com/office/drawing/2014/main" id="{EB2412FA-668A-BC49-6A93-401FB2A0288D}"/>
               </a:ext>
             </a:extLst>
           </p:cNvPr>
@@ -1270,7 +1270,7 @@
           <p:cNvPr id="6" name="スライド番号プレースホルダー 5">
             <a:extLst>
               <a:ext uri="{FF2B5EF4-FFF2-40B4-BE49-F238E27FC236}">
-                <a16:creationId xmlns:a16="http://schemas.microsoft.com/office/drawing/2014/main" id="{173E241B-074E-0E25-D14D-3D8F85BA017E}"/>
+                <a16:creationId xmlns:a16="http://schemas.microsoft.com/office/drawing/2014/main" id="{A1BBC4CC-3DF7-E585-2BF5-CA0C3C0A819B}"/>
               </a:ext>
             </a:extLst>
           </p:cNvPr>
@@ -1286,7 +1286,7 @@
           <a:bodyPr/>
           <a:lstStyle/>
           <a:p>
-            <a:fld id="{3F27CBD0-2DD2-46F7-B886-48E0FA7C6F19}" type="slidenum">
+            <a:fld id="{719CBD54-3D3B-46C8-8DA0-15A5B9F8456C}" type="slidenum">
               <a:rPr kumimoji="1" lang="ja-JP" altLang="en-US" smtClean="0"/>
               <a:t>‹#›</a:t>
             </a:fld>
@@ -1297,7 +1297,7 @@
     </p:spTree>
     <p:extLst>
       <p:ext uri="{BB962C8B-B14F-4D97-AF65-F5344CB8AC3E}">
-        <p14:creationId xmlns:p14="http://schemas.microsoft.com/office/powerpoint/2010/main" val="1842801378"/>
+        <p14:creationId xmlns:p14="http://schemas.microsoft.com/office/powerpoint/2010/main" val="1339805618"/>
       </p:ext>
     </p:extLst>
   </p:cSld>
@@ -1329,7 +1329,7 @@
           <p:cNvPr id="2" name="タイトル 1">
             <a:extLst>
               <a:ext uri="{FF2B5EF4-FFF2-40B4-BE49-F238E27FC236}">
-                <a16:creationId xmlns:a16="http://schemas.microsoft.com/office/drawing/2014/main" id="{B9AF2115-DEBB-EA42-30CB-0B942B5F1EDB}"/>
+                <a16:creationId xmlns:a16="http://schemas.microsoft.com/office/drawing/2014/main" id="{E28F2CF7-01FD-C0D6-9B16-3513798DF3E5}"/>
               </a:ext>
             </a:extLst>
           </p:cNvPr>
@@ -1357,7 +1357,7 @@
           <p:cNvPr id="3" name="コンテンツ プレースホルダー 2">
             <a:extLst>
               <a:ext uri="{FF2B5EF4-FFF2-40B4-BE49-F238E27FC236}">
-                <a16:creationId xmlns:a16="http://schemas.microsoft.com/office/drawing/2014/main" id="{DA838C32-759B-EC73-9645-2EA7A814EB80}"/>
+                <a16:creationId xmlns:a16="http://schemas.microsoft.com/office/drawing/2014/main" id="{D3C537D4-D312-79A9-3737-43B9D64404EB}"/>
               </a:ext>
             </a:extLst>
           </p:cNvPr>
@@ -1451,7 +1451,7 @@
           <p:cNvPr id="4" name="コンテンツ プレースホルダー 3">
             <a:extLst>
               <a:ext uri="{FF2B5EF4-FFF2-40B4-BE49-F238E27FC236}">
-                <a16:creationId xmlns:a16="http://schemas.microsoft.com/office/drawing/2014/main" id="{661B837E-BEEC-3172-B408-18393E8BE068}"/>
+                <a16:creationId xmlns:a16="http://schemas.microsoft.com/office/drawing/2014/main" id="{C97FC2B5-9678-6E9C-1DB6-5B80C8C3550F}"/>
               </a:ext>
             </a:extLst>
           </p:cNvPr>
@@ -1545,7 +1545,7 @@
           <p:cNvPr id="5" name="日付プレースホルダー 4">
             <a:extLst>
               <a:ext uri="{FF2B5EF4-FFF2-40B4-BE49-F238E27FC236}">
-                <a16:creationId xmlns:a16="http://schemas.microsoft.com/office/drawing/2014/main" id="{5D486D6E-85AC-65CA-3607-61DFACE29B51}"/>
+                <a16:creationId xmlns:a16="http://schemas.microsoft.com/office/drawing/2014/main" id="{3CECBF5D-A1CB-3DC3-E83B-FC42AE806593}"/>
               </a:ext>
             </a:extLst>
           </p:cNvPr>
@@ -1561,7 +1561,7 @@
           <a:bodyPr/>
           <a:lstStyle/>
           <a:p>
-            <a:fld id="{590A6DBF-BCB4-437A-9C96-F72DA2C8D429}" type="datetimeFigureOut">
+            <a:fld id="{FE0EF8CD-A123-4872-9453-D8392BEB8EE8}" type="datetimeFigureOut">
               <a:rPr kumimoji="1" lang="ja-JP" altLang="en-US" smtClean="0"/>
               <a:t>2026/7/30</a:t>
             </a:fld>
@@ -1574,7 +1574,7 @@
           <p:cNvPr id="6" name="フッター プレースホルダー 5">
             <a:extLst>
               <a:ext uri="{FF2B5EF4-FFF2-40B4-BE49-F238E27FC236}">
-                <a16:creationId xmlns:a16="http://schemas.microsoft.com/office/drawing/2014/main" id="{5AB984C8-9B18-4F5D-3B5C-22CAC80CD42D}"/>
+                <a16:creationId xmlns:a16="http://schemas.microsoft.com/office/drawing/2014/main" id="{786E6083-EAF6-6512-215A-F62C48A95EA0}"/>
               </a:ext>
             </a:extLst>
           </p:cNvPr>
@@ -1599,7 +1599,7 @@
           <p:cNvPr id="7" name="スライド番号プレースホルダー 6">
             <a:extLst>
               <a:ext uri="{FF2B5EF4-FFF2-40B4-BE49-F238E27FC236}">
-                <a16:creationId xmlns:a16="http://schemas.microsoft.com/office/drawing/2014/main" id="{2B4749CB-9704-EC5B-35DA-44D25991B321}"/>
+                <a16:creationId xmlns:a16="http://schemas.microsoft.com/office/drawing/2014/main" id="{4BD9651D-163A-162D-BEEF-F8404A318F10}"/>
               </a:ext>
             </a:extLst>
           </p:cNvPr>
@@ -1615,7 +1615,7 @@
           <a:bodyPr/>
           <a:lstStyle/>
           <a:p>
-            <a:fld id="{3F27CBD0-2DD2-46F7-B886-48E0FA7C6F19}" type="slidenum">
+            <a:fld id="{719CBD54-3D3B-46C8-8DA0-15A5B9F8456C}" type="slidenum">
               <a:rPr kumimoji="1" lang="ja-JP" altLang="en-US" smtClean="0"/>
               <a:t>‹#›</a:t>
             </a:fld>
@@ -1626,7 +1626,7 @@
     </p:spTree>
     <p:extLst>
       <p:ext uri="{BB962C8B-B14F-4D97-AF65-F5344CB8AC3E}">
-        <p14:creationId xmlns:p14="http://schemas.microsoft.com/office/powerpoint/2010/main" val="3079938393"/>
+        <p14:creationId xmlns:p14="http://schemas.microsoft.com/office/powerpoint/2010/main" val="3463832946"/>
       </p:ext>
     </p:extLst>
   </p:cSld>
@@ -1658,7 +1658,7 @@
           <p:cNvPr id="2" name="タイトル 1">
             <a:extLst>
               <a:ext uri="{FF2B5EF4-FFF2-40B4-BE49-F238E27FC236}">
-                <a16:creationId xmlns:a16="http://schemas.microsoft.com/office/drawing/2014/main" id="{16A57885-3441-7F7E-859D-1415CA1EEB5C}"/>
+                <a16:creationId xmlns:a16="http://schemas.microsoft.com/office/drawing/2014/main" id="{99F66943-72B8-3FA6-0BAD-F62B93CCEDB1}"/>
               </a:ext>
             </a:extLst>
           </p:cNvPr>
@@ -1691,7 +1691,7 @@
           <p:cNvPr id="3" name="テキスト プレースホルダー 2">
             <a:extLst>
               <a:ext uri="{FF2B5EF4-FFF2-40B4-BE49-F238E27FC236}">
-                <a16:creationId xmlns:a16="http://schemas.microsoft.com/office/drawing/2014/main" id="{19535611-B3B4-2075-63E0-E783EB9D074A}"/>
+                <a16:creationId xmlns:a16="http://schemas.microsoft.com/office/drawing/2014/main" id="{81402AFE-B9F7-48E1-4718-D950F39133A2}"/>
               </a:ext>
             </a:extLst>
           </p:cNvPr>
@@ -1762,7 +1762,7 @@
           <p:cNvPr id="4" name="コンテンツ プレースホルダー 3">
             <a:extLst>
               <a:ext uri="{FF2B5EF4-FFF2-40B4-BE49-F238E27FC236}">
-                <a16:creationId xmlns:a16="http://schemas.microsoft.com/office/drawing/2014/main" id="{85A4B1AF-E5AE-4E53-B63B-1C1245572DC0}"/>
+                <a16:creationId xmlns:a16="http://schemas.microsoft.com/office/drawing/2014/main" id="{E17F2941-054F-185E-F61F-EB3BC825E01B}"/>
               </a:ext>
             </a:extLst>
           </p:cNvPr>
@@ -1856,7 +1856,7 @@
           <p:cNvPr id="5" name="テキスト プレースホルダー 4">
             <a:extLst>
               <a:ext uri="{FF2B5EF4-FFF2-40B4-BE49-F238E27FC236}">
-                <a16:creationId xmlns:a16="http://schemas.microsoft.com/office/drawing/2014/main" id="{FA465728-F469-3FEE-0052-89AF83BD7610}"/>
+                <a16:creationId xmlns:a16="http://schemas.microsoft.com/office/drawing/2014/main" id="{A3383488-9335-0FE5-A021-CA78868E5640}"/>
               </a:ext>
             </a:extLst>
           </p:cNvPr>
@@ -1927,7 +1927,7 @@
           <p:cNvPr id="6" name="コンテンツ プレースホルダー 5">
             <a:extLst>
               <a:ext uri="{FF2B5EF4-FFF2-40B4-BE49-F238E27FC236}">
-                <a16:creationId xmlns:a16="http://schemas.microsoft.com/office/drawing/2014/main" id="{21F552F4-A1D6-2DA6-27D6-8630B05D1D06}"/>
+                <a16:creationId xmlns:a16="http://schemas.microsoft.com/office/drawing/2014/main" id="{FD3786A3-97B0-C8B4-1ABA-E44C8DB7CECA}"/>
               </a:ext>
             </a:extLst>
           </p:cNvPr>
@@ -2021,7 +2021,7 @@
           <p:cNvPr id="7" name="日付プレースホルダー 6">
             <a:extLst>
               <a:ext uri="{FF2B5EF4-FFF2-40B4-BE49-F238E27FC236}">
-                <a16:creationId xmlns:a16="http://schemas.microsoft.com/office/drawing/2014/main" id="{9FBA9A89-F6F0-93D1-75EE-318F72D31FB9}"/>
+                <a16:creationId xmlns:a16="http://schemas.microsoft.com/office/drawing/2014/main" id="{8A5B9757-908D-1267-F1F1-1A95F09B79DC}"/>
               </a:ext>
             </a:extLst>
           </p:cNvPr>
@@ -2037,7 +2037,7 @@
           <a:bodyPr/>
           <a:lstStyle/>
           <a:p>
-            <a:fld id="{590A6DBF-BCB4-437A-9C96-F72DA2C8D429}" type="datetimeFigureOut">
+            <a:fld id="{FE0EF8CD-A123-4872-9453-D8392BEB8EE8}" type="datetimeFigureOut">
               <a:rPr kumimoji="1" lang="ja-JP" altLang="en-US" smtClean="0"/>
               <a:t>2026/7/30</a:t>
             </a:fld>
@@ -2050,7 +2050,7 @@
           <p:cNvPr id="8" name="フッター プレースホルダー 7">
             <a:extLst>
               <a:ext uri="{FF2B5EF4-FFF2-40B4-BE49-F238E27FC236}">
-                <a16:creationId xmlns:a16="http://schemas.microsoft.com/office/drawing/2014/main" id="{33907765-6526-EF8D-5B7A-BA79F44A594B}"/>
+                <a16:creationId xmlns:a16="http://schemas.microsoft.com/office/drawing/2014/main" id="{4CFFDE82-475D-0014-A392-CB515C8B3C51}"/>
               </a:ext>
             </a:extLst>
           </p:cNvPr>
@@ -2075,7 +2075,7 @@
           <p:cNvPr id="9" name="スライド番号プレースホルダー 8">
             <a:extLst>
               <a:ext uri="{FF2B5EF4-FFF2-40B4-BE49-F238E27FC236}">
-                <a16:creationId xmlns:a16="http://schemas.microsoft.com/office/drawing/2014/main" id="{B331E379-C6B2-6287-3904-9E293A156ED0}"/>
+                <a16:creationId xmlns:a16="http://schemas.microsoft.com/office/drawing/2014/main" id="{9484A927-55EF-8637-00F9-A0FB6E635841}"/>
               </a:ext>
             </a:extLst>
           </p:cNvPr>
@@ -2091,7 +2091,7 @@
           <a:bodyPr/>
           <a:lstStyle/>
           <a:p>
-            <a:fld id="{3F27CBD0-2DD2-46F7-B886-48E0FA7C6F19}" type="slidenum">
+            <a:fld id="{719CBD54-3D3B-46C8-8DA0-15A5B9F8456C}" type="slidenum">
               <a:rPr kumimoji="1" lang="ja-JP" altLang="en-US" smtClean="0"/>
               <a:t>‹#›</a:t>
             </a:fld>
@@ -2102,7 +2102,7 @@
     </p:spTree>
     <p:extLst>
       <p:ext uri="{BB962C8B-B14F-4D97-AF65-F5344CB8AC3E}">
-        <p14:creationId xmlns:p14="http://schemas.microsoft.com/office/powerpoint/2010/main" val="3562500435"/>
+        <p14:creationId xmlns:p14="http://schemas.microsoft.com/office/powerpoint/2010/main" val="3890023379"/>
       </p:ext>
     </p:extLst>
   </p:cSld>
@@ -2134,7 +2134,7 @@
           <p:cNvPr id="2" name="タイトル 1">
             <a:extLst>
               <a:ext uri="{FF2B5EF4-FFF2-40B4-BE49-F238E27FC236}">
-                <a16:creationId xmlns:a16="http://schemas.microsoft.com/office/drawing/2014/main" id="{5380579C-94E4-004A-439C-C0827E44F396}"/>
+                <a16:creationId xmlns:a16="http://schemas.microsoft.com/office/drawing/2014/main" id="{15499B2D-90F0-81DA-BE86-726110D99E8B}"/>
               </a:ext>
             </a:extLst>
           </p:cNvPr>
@@ -2162,7 +2162,7 @@
           <p:cNvPr id="3" name="日付プレースホルダー 2">
             <a:extLst>
               <a:ext uri="{FF2B5EF4-FFF2-40B4-BE49-F238E27FC236}">
-                <a16:creationId xmlns:a16="http://schemas.microsoft.com/office/drawing/2014/main" id="{F66B18FE-00CC-A081-D0F7-9D242E94E9CA}"/>
+                <a16:creationId xmlns:a16="http://schemas.microsoft.com/office/drawing/2014/main" id="{1266C19C-CB99-662A-65E7-CE92195F5940}"/>
               </a:ext>
             </a:extLst>
           </p:cNvPr>
@@ -2178,7 +2178,7 @@
           <a:bodyPr/>
           <a:lstStyle/>
           <a:p>
-            <a:fld id="{590A6DBF-BCB4-437A-9C96-F72DA2C8D429}" type="datetimeFigureOut">
+            <a:fld id="{FE0EF8CD-A123-4872-9453-D8392BEB8EE8}" type="datetimeFigureOut">
               <a:rPr kumimoji="1" lang="ja-JP" altLang="en-US" smtClean="0"/>
               <a:t>2026/7/30</a:t>
             </a:fld>
@@ -2191,7 +2191,7 @@
           <p:cNvPr id="4" name="フッター プレースホルダー 3">
             <a:extLst>
               <a:ext uri="{FF2B5EF4-FFF2-40B4-BE49-F238E27FC236}">
-                <a16:creationId xmlns:a16="http://schemas.microsoft.com/office/drawing/2014/main" id="{1DC2B425-BA3E-A43A-8CE3-4DD582442233}"/>
+                <a16:creationId xmlns:a16="http://schemas.microsoft.com/office/drawing/2014/main" id="{48F29493-43FB-B7CA-70B7-AB3504D58BC8}"/>
               </a:ext>
             </a:extLst>
           </p:cNvPr>
@@ -2216,7 +2216,7 @@
           <p:cNvPr id="5" name="スライド番号プレースホルダー 4">
             <a:extLst>
               <a:ext uri="{FF2B5EF4-FFF2-40B4-BE49-F238E27FC236}">
-                <a16:creationId xmlns:a16="http://schemas.microsoft.com/office/drawing/2014/main" id="{A5D32756-40D5-EE2E-9E65-3F60E489AA69}"/>
+                <a16:creationId xmlns:a16="http://schemas.microsoft.com/office/drawing/2014/main" id="{1BCE0450-89F2-9151-4D86-50414076C214}"/>
               </a:ext>
             </a:extLst>
           </p:cNvPr>
@@ -2232,7 +2232,7 @@
           <a:bodyPr/>
           <a:lstStyle/>
           <a:p>
-            <a:fld id="{3F27CBD0-2DD2-46F7-B886-48E0FA7C6F19}" type="slidenum">
+            <a:fld id="{719CBD54-3D3B-46C8-8DA0-15A5B9F8456C}" type="slidenum">
               <a:rPr kumimoji="1" lang="ja-JP" altLang="en-US" smtClean="0"/>
               <a:t>‹#›</a:t>
             </a:fld>
@@ -2243,7 +2243,7 @@
     </p:spTree>
     <p:extLst>
       <p:ext uri="{BB962C8B-B14F-4D97-AF65-F5344CB8AC3E}">
-        <p14:creationId xmlns:p14="http://schemas.microsoft.com/office/powerpoint/2010/main" val="3869206736"/>
+        <p14:creationId xmlns:p14="http://schemas.microsoft.com/office/powerpoint/2010/main" val="2443285541"/>
       </p:ext>
     </p:extLst>
   </p:cSld>
@@ -2275,7 +2275,7 @@
           <p:cNvPr id="2" name="日付プレースホルダー 1">
             <a:extLst>
               <a:ext uri="{FF2B5EF4-FFF2-40B4-BE49-F238E27FC236}">
-                <a16:creationId xmlns:a16="http://schemas.microsoft.com/office/drawing/2014/main" id="{4621CE8F-A0ED-C4B9-FEED-307003C6B0BD}"/>
+                <a16:creationId xmlns:a16="http://schemas.microsoft.com/office/drawing/2014/main" id="{814647AA-4ACC-90A9-0F5A-D17A47A25527}"/>
               </a:ext>
             </a:extLst>
           </p:cNvPr>
@@ -2291,7 +2291,7 @@
           <a:bodyPr/>
           <a:lstStyle/>
           <a:p>
-            <a:fld id="{590A6DBF-BCB4-437A-9C96-F72DA2C8D429}" type="datetimeFigureOut">
+            <a:fld id="{FE0EF8CD-A123-4872-9453-D8392BEB8EE8}" type="datetimeFigureOut">
               <a:rPr kumimoji="1" lang="ja-JP" altLang="en-US" smtClean="0"/>
               <a:t>2026/7/30</a:t>
             </a:fld>
@@ -2304,7 +2304,7 @@
           <p:cNvPr id="3" name="フッター プレースホルダー 2">
             <a:extLst>
               <a:ext uri="{FF2B5EF4-FFF2-40B4-BE49-F238E27FC236}">
-                <a16:creationId xmlns:a16="http://schemas.microsoft.com/office/drawing/2014/main" id="{03076158-3518-F9FE-014E-D919F9EB2385}"/>
+                <a16:creationId xmlns:a16="http://schemas.microsoft.com/office/drawing/2014/main" id="{6F577C9A-D8B2-B348-60DE-17356C78A64A}"/>
               </a:ext>
             </a:extLst>
           </p:cNvPr>
@@ -2329,7 +2329,7 @@
           <p:cNvPr id="4" name="スライド番号プレースホルダー 3">
             <a:extLst>
               <a:ext uri="{FF2B5EF4-FFF2-40B4-BE49-F238E27FC236}">
-                <a16:creationId xmlns:a16="http://schemas.microsoft.com/office/drawing/2014/main" id="{552C963C-1E99-DFC9-8F86-ED9EE157673D}"/>
+                <a16:creationId xmlns:a16="http://schemas.microsoft.com/office/drawing/2014/main" id="{62D4F55E-61A4-3F8F-7C5E-88B5B827E1FC}"/>
               </a:ext>
             </a:extLst>
           </p:cNvPr>
@@ -2345,7 +2345,7 @@
           <a:bodyPr/>
           <a:lstStyle/>
           <a:p>
-            <a:fld id="{3F27CBD0-2DD2-46F7-B886-48E0FA7C6F19}" type="slidenum">
+            <a:fld id="{719CBD54-3D3B-46C8-8DA0-15A5B9F8456C}" type="slidenum">
               <a:rPr kumimoji="1" lang="ja-JP" altLang="en-US" smtClean="0"/>
               <a:t>‹#›</a:t>
             </a:fld>
@@ -2356,7 +2356,7 @@
     </p:spTree>
     <p:extLst>
       <p:ext uri="{BB962C8B-B14F-4D97-AF65-F5344CB8AC3E}">
-        <p14:creationId xmlns:p14="http://schemas.microsoft.com/office/powerpoint/2010/main" val="3125471594"/>
+        <p14:creationId xmlns:p14="http://schemas.microsoft.com/office/powerpoint/2010/main" val="123386371"/>
       </p:ext>
     </p:extLst>
   </p:cSld>
@@ -2388,7 +2388,7 @@
           <p:cNvPr id="2" name="タイトル 1">
             <a:extLst>
               <a:ext uri="{FF2B5EF4-FFF2-40B4-BE49-F238E27FC236}">
-                <a16:creationId xmlns:a16="http://schemas.microsoft.com/office/drawing/2014/main" id="{381C0866-F061-B283-D960-17A233071D47}"/>
+                <a16:creationId xmlns:a16="http://schemas.microsoft.com/office/drawing/2014/main" id="{017ACD47-661E-3312-3081-87ECE562628C}"/>
               </a:ext>
             </a:extLst>
           </p:cNvPr>
@@ -2425,7 +2425,7 @@
           <p:cNvPr id="3" name="コンテンツ プレースホルダー 2">
             <a:extLst>
               <a:ext uri="{FF2B5EF4-FFF2-40B4-BE49-F238E27FC236}">
-                <a16:creationId xmlns:a16="http://schemas.microsoft.com/office/drawing/2014/main" id="{6F319D16-FC69-EF81-A1C0-4FEE05808109}"/>
+                <a16:creationId xmlns:a16="http://schemas.microsoft.com/office/drawing/2014/main" id="{DF2167B0-A2CE-16F1-6D38-AB84D12FCF21}"/>
               </a:ext>
             </a:extLst>
           </p:cNvPr>
@@ -2547,7 +2547,7 @@
           <p:cNvPr id="4" name="テキスト プレースホルダー 3">
             <a:extLst>
               <a:ext uri="{FF2B5EF4-FFF2-40B4-BE49-F238E27FC236}">
-                <a16:creationId xmlns:a16="http://schemas.microsoft.com/office/drawing/2014/main" id="{DC1BA28F-44E1-5122-114A-58165D6C174A}"/>
+                <a16:creationId xmlns:a16="http://schemas.microsoft.com/office/drawing/2014/main" id="{79631E70-91D6-A9D5-5F5A-5AD2ED3CECC0}"/>
               </a:ext>
             </a:extLst>
           </p:cNvPr>
@@ -2618,7 +2618,7 @@
           <p:cNvPr id="5" name="日付プレースホルダー 4">
             <a:extLst>
               <a:ext uri="{FF2B5EF4-FFF2-40B4-BE49-F238E27FC236}">
-                <a16:creationId xmlns:a16="http://schemas.microsoft.com/office/drawing/2014/main" id="{B934CF98-B0EC-1B3B-3AD2-231D39AED954}"/>
+                <a16:creationId xmlns:a16="http://schemas.microsoft.com/office/drawing/2014/main" id="{C1CCF799-F8D8-33AA-19EA-190F6A0E2303}"/>
               </a:ext>
             </a:extLst>
           </p:cNvPr>
@@ -2634,7 +2634,7 @@
           <a:bodyPr/>
           <a:lstStyle/>
           <a:p>
-            <a:fld id="{590A6DBF-BCB4-437A-9C96-F72DA2C8D429}" type="datetimeFigureOut">
+            <a:fld id="{FE0EF8CD-A123-4872-9453-D8392BEB8EE8}" type="datetimeFigureOut">
               <a:rPr kumimoji="1" lang="ja-JP" altLang="en-US" smtClean="0"/>
               <a:t>2026/7/30</a:t>
             </a:fld>
@@ -2647,7 +2647,7 @@
           <p:cNvPr id="6" name="フッター プレースホルダー 5">
             <a:extLst>
               <a:ext uri="{FF2B5EF4-FFF2-40B4-BE49-F238E27FC236}">
-                <a16:creationId xmlns:a16="http://schemas.microsoft.com/office/drawing/2014/main" id="{CB26CD84-2836-E719-9C8E-9FE816824F02}"/>
+                <a16:creationId xmlns:a16="http://schemas.microsoft.com/office/drawing/2014/main" id="{1EDFB88F-B126-6976-E7C6-9BC7CD94F6EC}"/>
               </a:ext>
             </a:extLst>
           </p:cNvPr>
@@ -2672,7 +2672,7 @@
           <p:cNvPr id="7" name="スライド番号プレースホルダー 6">
             <a:extLst>
               <a:ext uri="{FF2B5EF4-FFF2-40B4-BE49-F238E27FC236}">
-                <a16:creationId xmlns:a16="http://schemas.microsoft.com/office/drawing/2014/main" id="{273027F0-D58A-1F4D-666B-57FE02FD4BCE}"/>
+                <a16:creationId xmlns:a16="http://schemas.microsoft.com/office/drawing/2014/main" id="{E9AAC1D1-080E-44B6-813C-7F4E3062F0CF}"/>
               </a:ext>
             </a:extLst>
           </p:cNvPr>
@@ -2688,7 +2688,7 @@
           <a:bodyPr/>
           <a:lstStyle/>
           <a:p>
-            <a:fld id="{3F27CBD0-2DD2-46F7-B886-48E0FA7C6F19}" type="slidenum">
+            <a:fld id="{719CBD54-3D3B-46C8-8DA0-15A5B9F8456C}" type="slidenum">
               <a:rPr kumimoji="1" lang="ja-JP" altLang="en-US" smtClean="0"/>
               <a:t>‹#›</a:t>
             </a:fld>
@@ -2699,7 +2699,7 @@
     </p:spTree>
     <p:extLst>
       <p:ext uri="{BB962C8B-B14F-4D97-AF65-F5344CB8AC3E}">
-        <p14:creationId xmlns:p14="http://schemas.microsoft.com/office/powerpoint/2010/main" val="1658882843"/>
+        <p14:creationId xmlns:p14="http://schemas.microsoft.com/office/powerpoint/2010/main" val="1158603104"/>
       </p:ext>
     </p:extLst>
   </p:cSld>
@@ -2731,7 +2731,7 @@
           <p:cNvPr id="2" name="タイトル 1">
             <a:extLst>
               <a:ext uri="{FF2B5EF4-FFF2-40B4-BE49-F238E27FC236}">
-                <a16:creationId xmlns:a16="http://schemas.microsoft.com/office/drawing/2014/main" id="{AA1AEF0D-0904-5ABC-1E0C-B000DD60EE3D}"/>
+                <a16:creationId xmlns:a16="http://schemas.microsoft.com/office/drawing/2014/main" id="{83EE73D7-D756-B9D7-DB3C-6DF50E247CD7}"/>
               </a:ext>
             </a:extLst>
           </p:cNvPr>
@@ -2768,7 +2768,7 @@
           <p:cNvPr id="3" name="図プレースホルダー 2">
             <a:extLst>
               <a:ext uri="{FF2B5EF4-FFF2-40B4-BE49-F238E27FC236}">
-                <a16:creationId xmlns:a16="http://schemas.microsoft.com/office/drawing/2014/main" id="{BBF8CDF1-E7C9-8EC5-71D1-7ED499A1EE51}"/>
+                <a16:creationId xmlns:a16="http://schemas.microsoft.com/office/drawing/2014/main" id="{165A7783-CBC7-5B0F-60B4-13BDB13833CB}"/>
               </a:ext>
             </a:extLst>
           </p:cNvPr>
@@ -2835,7 +2835,7 @@
           <p:cNvPr id="4" name="テキスト プレースホルダー 3">
             <a:extLst>
               <a:ext uri="{FF2B5EF4-FFF2-40B4-BE49-F238E27FC236}">
-                <a16:creationId xmlns:a16="http://schemas.microsoft.com/office/drawing/2014/main" id="{D7C748C3-DD87-3728-61AF-E96D53AEA013}"/>
+                <a16:creationId xmlns:a16="http://schemas.microsoft.com/office/drawing/2014/main" id="{8DBD5CF5-DE5C-2CA9-DFB6-9286F268A350}"/>
               </a:ext>
             </a:extLst>
           </p:cNvPr>
@@ -2906,7 +2906,7 @@
           <p:cNvPr id="5" name="日付プレースホルダー 4">
             <a:extLst>
               <a:ext uri="{FF2B5EF4-FFF2-40B4-BE49-F238E27FC236}">
-                <a16:creationId xmlns:a16="http://schemas.microsoft.com/office/drawing/2014/main" id="{965066B8-D0A1-3A08-7389-56335F647E00}"/>
+                <a16:creationId xmlns:a16="http://schemas.microsoft.com/office/drawing/2014/main" id="{33DFFAFD-B21D-94C9-042F-0C303EB64314}"/>
               </a:ext>
             </a:extLst>
           </p:cNvPr>
@@ -2922,7 +2922,7 @@
           <a:bodyPr/>
           <a:lstStyle/>
           <a:p>
-            <a:fld id="{590A6DBF-BCB4-437A-9C96-F72DA2C8D429}" type="datetimeFigureOut">
+            <a:fld id="{FE0EF8CD-A123-4872-9453-D8392BEB8EE8}" type="datetimeFigureOut">
               <a:rPr kumimoji="1" lang="ja-JP" altLang="en-US" smtClean="0"/>
               <a:t>2026/7/30</a:t>
             </a:fld>
@@ -2935,7 +2935,7 @@
           <p:cNvPr id="6" name="フッター プレースホルダー 5">
             <a:extLst>
               <a:ext uri="{FF2B5EF4-FFF2-40B4-BE49-F238E27FC236}">
-                <a16:creationId xmlns:a16="http://schemas.microsoft.com/office/drawing/2014/main" id="{E97D6F05-2207-40F4-2CCD-9FE1B979C5E9}"/>
+                <a16:creationId xmlns:a16="http://schemas.microsoft.com/office/drawing/2014/main" id="{E1E4F55D-9D99-F47F-39AF-160C0317BC04}"/>
               </a:ext>
             </a:extLst>
           </p:cNvPr>
@@ -2960,7 +2960,7 @@
           <p:cNvPr id="7" name="スライド番号プレースホルダー 6">
             <a:extLst>
               <a:ext uri="{FF2B5EF4-FFF2-40B4-BE49-F238E27FC236}">
-                <a16:creationId xmlns:a16="http://schemas.microsoft.com/office/drawing/2014/main" id="{244C10DB-AE72-36AA-218E-4BB31B3A856C}"/>
+                <a16:creationId xmlns:a16="http://schemas.microsoft.com/office/drawing/2014/main" id="{B9B67AF8-FF27-1A92-5299-901F9927E671}"/>
               </a:ext>
             </a:extLst>
           </p:cNvPr>
@@ -2976,7 +2976,7 @@
           <a:bodyPr/>
           <a:lstStyle/>
           <a:p>
-            <a:fld id="{3F27CBD0-2DD2-46F7-B886-48E0FA7C6F19}" type="slidenum">
+            <a:fld id="{719CBD54-3D3B-46C8-8DA0-15A5B9F8456C}" type="slidenum">
               <a:rPr kumimoji="1" lang="ja-JP" altLang="en-US" smtClean="0"/>
               <a:t>‹#›</a:t>
             </a:fld>
@@ -2987,7 +2987,7 @@
     </p:spTree>
     <p:extLst>
       <p:ext uri="{BB962C8B-B14F-4D97-AF65-F5344CB8AC3E}">
-        <p14:creationId xmlns:p14="http://schemas.microsoft.com/office/powerpoint/2010/main" val="2662110002"/>
+        <p14:creationId xmlns:p14="http://schemas.microsoft.com/office/powerpoint/2010/main" val="423632110"/>
       </p:ext>
     </p:extLst>
   </p:cSld>
@@ -3024,7 +3024,7 @@
           <p:cNvPr id="2" name="タイトル プレースホルダー 1">
             <a:extLst>
               <a:ext uri="{FF2B5EF4-FFF2-40B4-BE49-F238E27FC236}">
-                <a16:creationId xmlns:a16="http://schemas.microsoft.com/office/drawing/2014/main" id="{59F2E2F7-97F1-CC12-5AB0-B3AE68889E11}"/>
+                <a16:creationId xmlns:a16="http://schemas.microsoft.com/office/drawing/2014/main" id="{F3C430CC-04D6-BCA2-51F6-C227D7963A5E}"/>
               </a:ext>
             </a:extLst>
           </p:cNvPr>
@@ -3062,7 +3062,7 @@
           <p:cNvPr id="3" name="テキスト プレースホルダー 2">
             <a:extLst>
               <a:ext uri="{FF2B5EF4-FFF2-40B4-BE49-F238E27FC236}">
-                <a16:creationId xmlns:a16="http://schemas.microsoft.com/office/drawing/2014/main" id="{58579391-F716-A6C4-8B66-8AEADB16EE69}"/>
+                <a16:creationId xmlns:a16="http://schemas.microsoft.com/office/drawing/2014/main" id="{71A7EBF2-7224-0DE3-98AC-9EB49B9AE4DE}"/>
               </a:ext>
             </a:extLst>
           </p:cNvPr>
@@ -3161,7 +3161,7 @@
           <p:cNvPr id="4" name="日付プレースホルダー 3">
             <a:extLst>
               <a:ext uri="{FF2B5EF4-FFF2-40B4-BE49-F238E27FC236}">
-                <a16:creationId xmlns:a16="http://schemas.microsoft.com/office/drawing/2014/main" id="{C2506CB9-312B-C61A-6FED-5ACD6998020B}"/>
+                <a16:creationId xmlns:a16="http://schemas.microsoft.com/office/drawing/2014/main" id="{1C765DAF-7D31-0EB6-6D58-63B9690415FF}"/>
               </a:ext>
             </a:extLst>
           </p:cNvPr>
@@ -3195,7 +3195,7 @@
             </a:lvl1pPr>
           </a:lstStyle>
           <a:p>
-            <a:fld id="{590A6DBF-BCB4-437A-9C96-F72DA2C8D429}" type="datetimeFigureOut">
+            <a:fld id="{FE0EF8CD-A123-4872-9453-D8392BEB8EE8}" type="datetimeFigureOut">
               <a:rPr kumimoji="1" lang="ja-JP" altLang="en-US" smtClean="0"/>
               <a:t>2026/7/30</a:t>
             </a:fld>
@@ -3208,7 +3208,7 @@
           <p:cNvPr id="5" name="フッター プレースホルダー 4">
             <a:extLst>
               <a:ext uri="{FF2B5EF4-FFF2-40B4-BE49-F238E27FC236}">
-                <a16:creationId xmlns:a16="http://schemas.microsoft.com/office/drawing/2014/main" id="{204AE3D6-130A-3AC0-ADBB-2DD025F859FE}"/>
+                <a16:creationId xmlns:a16="http://schemas.microsoft.com/office/drawing/2014/main" id="{4490B23A-8D28-D02C-4EC8-496E63BDF2E0}"/>
               </a:ext>
             </a:extLst>
           </p:cNvPr>
@@ -3251,7 +3251,7 @@
           <p:cNvPr id="6" name="スライド番号プレースホルダー 5">
             <a:extLst>
               <a:ext uri="{FF2B5EF4-FFF2-40B4-BE49-F238E27FC236}">
-                <a16:creationId xmlns:a16="http://schemas.microsoft.com/office/drawing/2014/main" id="{0262BCF6-8F3E-9906-B60B-CB58DD75348F}"/>
+                <a16:creationId xmlns:a16="http://schemas.microsoft.com/office/drawing/2014/main" id="{A126DACA-9036-8962-FA8A-1B9C9AAB1293}"/>
               </a:ext>
             </a:extLst>
           </p:cNvPr>
@@ -3285,7 +3285,7 @@
             </a:lvl1pPr>
           </a:lstStyle>
           <a:p>
-            <a:fld id="{3F27CBD0-2DD2-46F7-B886-48E0FA7C6F19}" type="slidenum">
+            <a:fld id="{719CBD54-3D3B-46C8-8DA0-15A5B9F8456C}" type="slidenum">
               <a:rPr kumimoji="1" lang="ja-JP" altLang="en-US" smtClean="0"/>
               <a:t>‹#›</a:t>
             </a:fld>
@@ -3296,7 +3296,7 @@
     </p:spTree>
     <p:extLst>
       <p:ext uri="{BB962C8B-B14F-4D97-AF65-F5344CB8AC3E}">
-        <p14:creationId xmlns:p14="http://schemas.microsoft.com/office/powerpoint/2010/main" val="4095172278"/>
+        <p14:creationId xmlns:p14="http://schemas.microsoft.com/office/powerpoint/2010/main" val="3145343006"/>
       </p:ext>
     </p:extLst>
   </p:cSld>
@@ -3619,7 +3619,7 @@
           <p:cNvPr id="2" name="テキスト ボックス 1">
             <a:extLst>
               <a:ext uri="{FF2B5EF4-FFF2-40B4-BE49-F238E27FC236}">
-                <a16:creationId xmlns:a16="http://schemas.microsoft.com/office/drawing/2014/main" id="{FFCA96B0-1CC8-1620-6475-973C5BFAAA57}"/>
+                <a16:creationId xmlns:a16="http://schemas.microsoft.com/office/drawing/2014/main" id="{7753C175-437A-335A-8D49-3B95626443CD}"/>
               </a:ext>
             </a:extLst>
           </p:cNvPr>
@@ -3665,7 +3665,7 @@
           <p:cNvPr id="3" name="テキスト ボックス 2">
             <a:extLst>
               <a:ext uri="{FF2B5EF4-FFF2-40B4-BE49-F238E27FC236}">
-                <a16:creationId xmlns:a16="http://schemas.microsoft.com/office/drawing/2014/main" id="{276D0883-7529-43FA-BF53-2BECCB7C4172}"/>
+                <a16:creationId xmlns:a16="http://schemas.microsoft.com/office/drawing/2014/main" id="{68029711-9179-9D5D-46F8-78E6D59C872C}"/>
               </a:ext>
             </a:extLst>
           </p:cNvPr>
@@ -3714,7 +3714,7 @@
           <p:cNvPr id="4" name="テキスト ボックス 3">
             <a:extLst>
               <a:ext uri="{FF2B5EF4-FFF2-40B4-BE49-F238E27FC236}">
-                <a16:creationId xmlns:a16="http://schemas.microsoft.com/office/drawing/2014/main" id="{67A9A453-A73B-F503-48D5-99D5DDF393DE}"/>
+                <a16:creationId xmlns:a16="http://schemas.microsoft.com/office/drawing/2014/main" id="{1CF59A04-DB33-580A-26E5-4D0D257EC2DC}"/>
               </a:ext>
             </a:extLst>
           </p:cNvPr>
@@ -3754,7 +3754,7 @@
           <p:cNvPr id="5" name="テキスト ボックス 4">
             <a:extLst>
               <a:ext uri="{FF2B5EF4-FFF2-40B4-BE49-F238E27FC236}">
-                <a16:creationId xmlns:a16="http://schemas.microsoft.com/office/drawing/2014/main" id="{61F070C8-52E5-C698-F197-B65390B86E2A}"/>
+                <a16:creationId xmlns:a16="http://schemas.microsoft.com/office/drawing/2014/main" id="{3103F7BB-2295-06E4-A8CE-C5FF2AF9AA32}"/>
               </a:ext>
             </a:extLst>
           </p:cNvPr>
@@ -3801,7 +3801,7 @@
             <a:hlinkClick r:id="" action="ppaction://media"/>
             <a:extLst>
               <a:ext uri="{FF2B5EF4-FFF2-40B4-BE49-F238E27FC236}">
-                <a16:creationId xmlns:a16="http://schemas.microsoft.com/office/drawing/2014/main" id="{F6AC9308-8784-3B41-DD8E-1C1F50EBD023}"/>
+                <a16:creationId xmlns:a16="http://schemas.microsoft.com/office/drawing/2014/main" id="{DBF02D92-8445-8558-E181-602C7207E672}"/>
               </a:ext>
             </a:extLst>
           </p:cNvPr>
@@ -3836,7 +3836,7 @@
     </p:spTree>
     <p:extLst>
       <p:ext uri="{BB962C8B-B14F-4D97-AF65-F5344CB8AC3E}">
-        <p14:creationId xmlns:p14="http://schemas.microsoft.com/office/powerpoint/2010/main" val="4202981984"/>
+        <p14:creationId xmlns:p14="http://schemas.microsoft.com/office/powerpoint/2010/main" val="4233096819"/>
       </p:ext>
     </p:extLst>
   </p:cSld>
@@ -3960,7 +3960,7 @@
           <p:cNvPr id="2" name="テキスト ボックス 1">
             <a:extLst>
               <a:ext uri="{FF2B5EF4-FFF2-40B4-BE49-F238E27FC236}">
-                <a16:creationId xmlns:a16="http://schemas.microsoft.com/office/drawing/2014/main" id="{75FEA1F8-BD51-812A-20B3-639C57149CE7}"/>
+                <a16:creationId xmlns:a16="http://schemas.microsoft.com/office/drawing/2014/main" id="{181A2974-BAAA-3E6C-FE51-DA173DDEBA1F}"/>
               </a:ext>
             </a:extLst>
           </p:cNvPr>
@@ -4006,7 +4006,7 @@
           <p:cNvPr id="3" name="テキスト ボックス 2">
             <a:extLst>
               <a:ext uri="{FF2B5EF4-FFF2-40B4-BE49-F238E27FC236}">
-                <a16:creationId xmlns:a16="http://schemas.microsoft.com/office/drawing/2014/main" id="{CB0A96C7-8427-C40E-58E4-4A49D985C4B6}"/>
+                <a16:creationId xmlns:a16="http://schemas.microsoft.com/office/drawing/2014/main" id="{B9D46B87-C184-D2AF-D5B7-60237A528EA5}"/>
               </a:ext>
             </a:extLst>
           </p:cNvPr>
@@ -4046,7 +4046,7 @@
           <p:cNvPr id="4" name="テキスト ボックス 3">
             <a:extLst>
               <a:ext uri="{FF2B5EF4-FFF2-40B4-BE49-F238E27FC236}">
-                <a16:creationId xmlns:a16="http://schemas.microsoft.com/office/drawing/2014/main" id="{7BD03D16-AC1E-581C-ADAB-919C6D82CBD4}"/>
+                <a16:creationId xmlns:a16="http://schemas.microsoft.com/office/drawing/2014/main" id="{6E735484-119A-0AB9-7452-531934044B43}"/>
               </a:ext>
             </a:extLst>
           </p:cNvPr>
@@ -4095,7 +4095,7 @@
           <p:cNvPr id="5" name="テキスト ボックス 4">
             <a:extLst>
               <a:ext uri="{FF2B5EF4-FFF2-40B4-BE49-F238E27FC236}">
-                <a16:creationId xmlns:a16="http://schemas.microsoft.com/office/drawing/2014/main" id="{46EDBD1F-8AEB-B48D-07D1-E06B6CB3B498}"/>
+                <a16:creationId xmlns:a16="http://schemas.microsoft.com/office/drawing/2014/main" id="{C8611C1A-FCD7-F4B7-C8FD-57CF30CAE09E}"/>
               </a:ext>
             </a:extLst>
           </p:cNvPr>
@@ -4142,7 +4142,7 @@
             <a:hlinkClick r:id="" action="ppaction://media"/>
             <a:extLst>
               <a:ext uri="{FF2B5EF4-FFF2-40B4-BE49-F238E27FC236}">
-                <a16:creationId xmlns:a16="http://schemas.microsoft.com/office/drawing/2014/main" id="{091198E2-BCDB-97AF-48E1-8F0006CF49D0}"/>
+                <a16:creationId xmlns:a16="http://schemas.microsoft.com/office/drawing/2014/main" id="{5C5E2497-48AD-ADE0-A7A3-414F31BD4785}"/>
               </a:ext>
             </a:extLst>
           </p:cNvPr>
@@ -4177,7 +4177,7 @@
     </p:spTree>
     <p:extLst>
       <p:ext uri="{BB962C8B-B14F-4D97-AF65-F5344CB8AC3E}">
-        <p14:creationId xmlns:p14="http://schemas.microsoft.com/office/powerpoint/2010/main" val="1271793291"/>
+        <p14:creationId xmlns:p14="http://schemas.microsoft.com/office/powerpoint/2010/main" val="4037966775"/>
       </p:ext>
     </p:extLst>
   </p:cSld>
@@ -4301,7 +4301,7 @@
           <p:cNvPr id="2" name="テキスト ボックス 1">
             <a:extLst>
               <a:ext uri="{FF2B5EF4-FFF2-40B4-BE49-F238E27FC236}">
-                <a16:creationId xmlns:a16="http://schemas.microsoft.com/office/drawing/2014/main" id="{A412F497-3EA2-D3DE-555A-537019F9C9D5}"/>
+                <a16:creationId xmlns:a16="http://schemas.microsoft.com/office/drawing/2014/main" id="{E438478A-519F-522C-386D-6E72E3D82E7F}"/>
               </a:ext>
             </a:extLst>
           </p:cNvPr>
@@ -4347,7 +4347,7 @@
           <p:cNvPr id="3" name="テキスト ボックス 2">
             <a:extLst>
               <a:ext uri="{FF2B5EF4-FFF2-40B4-BE49-F238E27FC236}">
-                <a16:creationId xmlns:a16="http://schemas.microsoft.com/office/drawing/2014/main" id="{8848ADC3-7A2B-AE6B-9480-87362BEFD7DF}"/>
+                <a16:creationId xmlns:a16="http://schemas.microsoft.com/office/drawing/2014/main" id="{270DEBBF-1C4B-080C-BCBD-DA11F6523A6B}"/>
               </a:ext>
             </a:extLst>
           </p:cNvPr>
@@ -4387,7 +4387,7 @@
           <p:cNvPr id="4" name="テキスト ボックス 3">
             <a:extLst>
               <a:ext uri="{FF2B5EF4-FFF2-40B4-BE49-F238E27FC236}">
-                <a16:creationId xmlns:a16="http://schemas.microsoft.com/office/drawing/2014/main" id="{56839BA5-D24B-421B-2619-5C1EB2982D5B}"/>
+                <a16:creationId xmlns:a16="http://schemas.microsoft.com/office/drawing/2014/main" id="{59DD8FEB-8B52-4A43-7876-8A476F0F06D4}"/>
               </a:ext>
             </a:extLst>
           </p:cNvPr>
@@ -4500,7 +4500,7 @@
           <p:cNvPr id="5" name="テキスト ボックス 4">
             <a:extLst>
               <a:ext uri="{FF2B5EF4-FFF2-40B4-BE49-F238E27FC236}">
-                <a16:creationId xmlns:a16="http://schemas.microsoft.com/office/drawing/2014/main" id="{54265F9C-8AEF-D98B-B8B1-8194DA9EE856}"/>
+                <a16:creationId xmlns:a16="http://schemas.microsoft.com/office/drawing/2014/main" id="{95EB72F3-2259-FD8B-5919-F507F626BB69}"/>
               </a:ext>
             </a:extLst>
           </p:cNvPr>
@@ -4547,7 +4547,7 @@
             <a:hlinkClick r:id="" action="ppaction://media"/>
             <a:extLst>
               <a:ext uri="{FF2B5EF4-FFF2-40B4-BE49-F238E27FC236}">
-                <a16:creationId xmlns:a16="http://schemas.microsoft.com/office/drawing/2014/main" id="{47DAEC37-98CD-5E25-B6FC-E70B7A5535BB}"/>
+                <a16:creationId xmlns:a16="http://schemas.microsoft.com/office/drawing/2014/main" id="{759D791E-7B3D-4724-EA31-1CC33694A3F4}"/>
               </a:ext>
             </a:extLst>
           </p:cNvPr>
@@ -4582,7 +4582,7 @@
     </p:spTree>
     <p:extLst>
       <p:ext uri="{BB962C8B-B14F-4D97-AF65-F5344CB8AC3E}">
-        <p14:creationId xmlns:p14="http://schemas.microsoft.com/office/powerpoint/2010/main" val="4188374583"/>
+        <p14:creationId xmlns:p14="http://schemas.microsoft.com/office/powerpoint/2010/main" val="1282523502"/>
       </p:ext>
     </p:extLst>
   </p:cSld>
@@ -4706,7 +4706,7 @@
           <p:cNvPr id="2" name="テキスト ボックス 1">
             <a:extLst>
               <a:ext uri="{FF2B5EF4-FFF2-40B4-BE49-F238E27FC236}">
-                <a16:creationId xmlns:a16="http://schemas.microsoft.com/office/drawing/2014/main" id="{76B16D7B-A9FC-3572-2639-21C35DA54EAA}"/>
+                <a16:creationId xmlns:a16="http://schemas.microsoft.com/office/drawing/2014/main" id="{653A3AA7-EEFF-B904-C106-B23A2A522E79}"/>
               </a:ext>
             </a:extLst>
           </p:cNvPr>
@@ -4752,7 +4752,7 @@
           <p:cNvPr id="3" name="テキスト ボックス 2">
             <a:extLst>
               <a:ext uri="{FF2B5EF4-FFF2-40B4-BE49-F238E27FC236}">
-                <a16:creationId xmlns:a16="http://schemas.microsoft.com/office/drawing/2014/main" id="{6AD1B3BF-0A50-2891-2D4E-A17CC7ED5834}"/>
+                <a16:creationId xmlns:a16="http://schemas.microsoft.com/office/drawing/2014/main" id="{67051024-550D-1AF1-1331-157B650745DA}"/>
               </a:ext>
             </a:extLst>
           </p:cNvPr>
@@ -4792,7 +4792,7 @@
           <p:cNvPr id="4" name="テキスト ボックス 3">
             <a:extLst>
               <a:ext uri="{FF2B5EF4-FFF2-40B4-BE49-F238E27FC236}">
-                <a16:creationId xmlns:a16="http://schemas.microsoft.com/office/drawing/2014/main" id="{FAB83F04-B0A5-5547-4EE4-990A02B1E21F}"/>
+                <a16:creationId xmlns:a16="http://schemas.microsoft.com/office/drawing/2014/main" id="{B807FC9A-AEBD-969C-61D5-F61D03ED9819}"/>
               </a:ext>
             </a:extLst>
           </p:cNvPr>
@@ -4902,7 +4902,7 @@
           <p:cNvPr id="5" name="テキスト ボックス 4">
             <a:extLst>
               <a:ext uri="{FF2B5EF4-FFF2-40B4-BE49-F238E27FC236}">
-                <a16:creationId xmlns:a16="http://schemas.microsoft.com/office/drawing/2014/main" id="{B1770162-D6BB-81E8-2D2B-EA2547254D97}"/>
+                <a16:creationId xmlns:a16="http://schemas.microsoft.com/office/drawing/2014/main" id="{7F4C390D-879E-02DB-738D-E3B59D5288F9}"/>
               </a:ext>
             </a:extLst>
           </p:cNvPr>
@@ -4949,7 +4949,7 @@
             <a:hlinkClick r:id="" action="ppaction://media"/>
             <a:extLst>
               <a:ext uri="{FF2B5EF4-FFF2-40B4-BE49-F238E27FC236}">
-                <a16:creationId xmlns:a16="http://schemas.microsoft.com/office/drawing/2014/main" id="{22B7F2B7-C826-7BE4-057A-F57EF6FD5540}"/>
+                <a16:creationId xmlns:a16="http://schemas.microsoft.com/office/drawing/2014/main" id="{A8653951-5697-AFC6-3DC6-EE0990D237C5}"/>
               </a:ext>
             </a:extLst>
           </p:cNvPr>
@@ -4984,7 +4984,7 @@
     </p:spTree>
     <p:extLst>
       <p:ext uri="{BB962C8B-B14F-4D97-AF65-F5344CB8AC3E}">
-        <p14:creationId xmlns:p14="http://schemas.microsoft.com/office/powerpoint/2010/main" val="2213863730"/>
+        <p14:creationId xmlns:p14="http://schemas.microsoft.com/office/powerpoint/2010/main" val="2028072646"/>
       </p:ext>
     </p:extLst>
   </p:cSld>
@@ -5108,7 +5108,7 @@
           <p:cNvPr id="2" name="テキスト ボックス 1">
             <a:extLst>
               <a:ext uri="{FF2B5EF4-FFF2-40B4-BE49-F238E27FC236}">
-                <a16:creationId xmlns:a16="http://schemas.microsoft.com/office/drawing/2014/main" id="{5D030F4F-072F-F5C4-B998-D253CAFA453F}"/>
+                <a16:creationId xmlns:a16="http://schemas.microsoft.com/office/drawing/2014/main" id="{74DC0734-8C3C-58D4-C4E7-2DF4D355A831}"/>
               </a:ext>
             </a:extLst>
           </p:cNvPr>
@@ -5154,7 +5154,7 @@
           <p:cNvPr id="3" name="テキスト ボックス 2">
             <a:extLst>
               <a:ext uri="{FF2B5EF4-FFF2-40B4-BE49-F238E27FC236}">
-                <a16:creationId xmlns:a16="http://schemas.microsoft.com/office/drawing/2014/main" id="{32DBAA03-3D3B-229B-2881-67231EE2848E}"/>
+                <a16:creationId xmlns:a16="http://schemas.microsoft.com/office/drawing/2014/main" id="{2F6F5294-6836-B890-A66C-9E3BBC8A5B44}"/>
               </a:ext>
             </a:extLst>
           </p:cNvPr>
@@ -5194,7 +5194,7 @@
           <p:cNvPr id="4" name="テキスト ボックス 3">
             <a:extLst>
               <a:ext uri="{FF2B5EF4-FFF2-40B4-BE49-F238E27FC236}">
-                <a16:creationId xmlns:a16="http://schemas.microsoft.com/office/drawing/2014/main" id="{B2403F82-AC5A-C852-2409-3F3DA5E6CEED}"/>
+                <a16:creationId xmlns:a16="http://schemas.microsoft.com/office/drawing/2014/main" id="{B640E350-125B-07D6-4DBB-65CEE992842A}"/>
               </a:ext>
             </a:extLst>
           </p:cNvPr>
@@ -5218,20 +5218,14 @@
           <a:lstStyle/>
           <a:p>
             <a:r>
-              <a:rPr kumimoji="1" lang="en-US" altLang="ja-JP" sz="2000">
+              <a:rPr kumimoji="1" lang="ja-JP" altLang="en-US" sz="2000">
                 <a:solidFill>
                   <a:srgbClr val="333333"/>
                 </a:solidFill>
                 <a:latin typeface="Arial" panose="020B0604020202020204" pitchFamily="34" charset="0"/>
               </a:rPr>
-              <a:t>$(cat &lt;&lt;'EOF'</a:t>
-            </a:r>
-            <a:endParaRPr kumimoji="1" lang="ja-JP" altLang="en-US" sz="2000">
-              <a:solidFill>
-                <a:srgbClr val="333333"/>
-              </a:solidFill>
-              <a:latin typeface="Arial" panose="020B0604020202020204" pitchFamily="34" charset="0"/>
-            </a:endParaRPr>
+              <a:t>直近のコミットでは、実装の見直しと継続的な改善が行われました。</a:t>
+            </a:r>
           </a:p>
         </p:txBody>
       </p:sp>
@@ -5240,7 +5234,7 @@
           <p:cNvPr id="5" name="テキスト ボックス 4">
             <a:extLst>
               <a:ext uri="{FF2B5EF4-FFF2-40B4-BE49-F238E27FC236}">
-                <a16:creationId xmlns:a16="http://schemas.microsoft.com/office/drawing/2014/main" id="{3536E454-C14F-58DF-F8CC-59CE7D80336B}"/>
+                <a16:creationId xmlns:a16="http://schemas.microsoft.com/office/drawing/2014/main" id="{F41BD2FB-C66C-D2CD-4A00-57B51617FE2B}"/>
               </a:ext>
             </a:extLst>
           </p:cNvPr>
@@ -5287,7 +5281,7 @@
             <a:hlinkClick r:id="" action="ppaction://media"/>
             <a:extLst>
               <a:ext uri="{FF2B5EF4-FFF2-40B4-BE49-F238E27FC236}">
-                <a16:creationId xmlns:a16="http://schemas.microsoft.com/office/drawing/2014/main" id="{47398E96-6FD7-26C8-E258-413B311151FD}"/>
+                <a16:creationId xmlns:a16="http://schemas.microsoft.com/office/drawing/2014/main" id="{D488FEA0-296E-AA9D-5785-DC58A50E1A32}"/>
               </a:ext>
             </a:extLst>
           </p:cNvPr>
@@ -5322,7 +5316,7 @@
     </p:spTree>
     <p:extLst>
       <p:ext uri="{BB962C8B-B14F-4D97-AF65-F5344CB8AC3E}">
-        <p14:creationId xmlns:p14="http://schemas.microsoft.com/office/powerpoint/2010/main" val="476925810"/>
+        <p14:creationId xmlns:p14="http://schemas.microsoft.com/office/powerpoint/2010/main" val="3249753738"/>
       </p:ext>
     </p:extLst>
   </p:cSld>
@@ -5331,10 +5325,10 @@
   </p:clrMapOvr>
   <mc:AlternateContent xmlns:mc="http://schemas.openxmlformats.org/markup-compatibility/2006">
     <mc:Choice xmlns:p14="http://schemas.microsoft.com/office/powerpoint/2010/main" Requires="p14">
-      <p:transition spd="slow" p14:dur="2000" advTm="9000"/>
+      <p:transition spd="slow" p14:dur="2000" advTm="7000"/>
     </mc:Choice>
     <mc:Fallback>
-      <p:transition spd="slow" advTm="9000"/>
+      <p:transition spd="slow" advTm="7000"/>
     </mc:Fallback>
   </mc:AlternateContent>
   <p:timing>
@@ -5365,7 +5359,7 @@
                                   <p:childTnLst>
                                     <p:cmd type="call" cmd="playFrom(0.0)">
                                       <p:cBhvr>
-                                        <p:cTn id="6" dur="8006" fill="hold"/>
+                                        <p:cTn id="6" dur="6076" fill="hold"/>
                                         <p:tgtEl>
                                           <p:spTgt spid="6"/>
                                         </p:tgtEl>
@@ -5446,7 +5440,7 @@
           <p:cNvPr id="2" name="テキスト ボックス 1">
             <a:extLst>
               <a:ext uri="{FF2B5EF4-FFF2-40B4-BE49-F238E27FC236}">
-                <a16:creationId xmlns:a16="http://schemas.microsoft.com/office/drawing/2014/main" id="{AA58C0BD-0D35-478B-BB1C-ABE05ADAC937}"/>
+                <a16:creationId xmlns:a16="http://schemas.microsoft.com/office/drawing/2014/main" id="{DFC64603-0F4E-528F-E4D9-752759EC9A6C}"/>
               </a:ext>
             </a:extLst>
           </p:cNvPr>
@@ -5492,7 +5486,7 @@
           <p:cNvPr id="3" name="テキスト ボックス 2">
             <a:extLst>
               <a:ext uri="{FF2B5EF4-FFF2-40B4-BE49-F238E27FC236}">
-                <a16:creationId xmlns:a16="http://schemas.microsoft.com/office/drawing/2014/main" id="{A7BB0050-FDFA-2414-52CE-E3E35203F45D}"/>
+                <a16:creationId xmlns:a16="http://schemas.microsoft.com/office/drawing/2014/main" id="{9CC63B63-8E4D-1511-DC52-7FEAE4059967}"/>
               </a:ext>
             </a:extLst>
           </p:cNvPr>
@@ -5532,7 +5526,7 @@
           <p:cNvPr id="4" name="テキスト ボックス 3">
             <a:extLst>
               <a:ext uri="{FF2B5EF4-FFF2-40B4-BE49-F238E27FC236}">
-                <a16:creationId xmlns:a16="http://schemas.microsoft.com/office/drawing/2014/main" id="{2F3C0E44-33B5-34AC-73A5-6CBBFE1D6ADA}"/>
+                <a16:creationId xmlns:a16="http://schemas.microsoft.com/office/drawing/2014/main" id="{2B6833B4-513E-4E64-6B1E-209677710542}"/>
               </a:ext>
             </a:extLst>
           </p:cNvPr>
@@ -5597,7 +5591,7 @@
           <p:cNvPr id="5" name="テキスト ボックス 4">
             <a:extLst>
               <a:ext uri="{FF2B5EF4-FFF2-40B4-BE49-F238E27FC236}">
-                <a16:creationId xmlns:a16="http://schemas.microsoft.com/office/drawing/2014/main" id="{FBA019B8-534D-4524-9D74-FF1F14B80CAE}"/>
+                <a16:creationId xmlns:a16="http://schemas.microsoft.com/office/drawing/2014/main" id="{195007EB-B399-67BA-5653-96B48D768839}"/>
               </a:ext>
             </a:extLst>
           </p:cNvPr>
@@ -5644,7 +5638,7 @@
             <a:hlinkClick r:id="" action="ppaction://media"/>
             <a:extLst>
               <a:ext uri="{FF2B5EF4-FFF2-40B4-BE49-F238E27FC236}">
-                <a16:creationId xmlns:a16="http://schemas.microsoft.com/office/drawing/2014/main" id="{7C84B97D-9B67-74E5-23F9-4C4CA8DAF5CE}"/>
+                <a16:creationId xmlns:a16="http://schemas.microsoft.com/office/drawing/2014/main" id="{C4FA5FEF-AC61-A9D4-3E21-D5BB5DA9E342}"/>
               </a:ext>
             </a:extLst>
           </p:cNvPr>
@@ -5679,7 +5673,7 @@
     </p:spTree>
     <p:extLst>
       <p:ext uri="{BB962C8B-B14F-4D97-AF65-F5344CB8AC3E}">
-        <p14:creationId xmlns:p14="http://schemas.microsoft.com/office/powerpoint/2010/main" val="2108144092"/>
+        <p14:creationId xmlns:p14="http://schemas.microsoft.com/office/powerpoint/2010/main" val="987904264"/>
       </p:ext>
     </p:extLst>
   </p:cSld>
